--- a/templates/posts/october/2026-10-21-wed-ig-scholarship-recipient.pptx
+++ b/templates/posts/october/2026-10-21-wed-ig-scholarship-recipient.pptx
@@ -3984,92 +3984,33 @@
           </a:p>
         </p:txBody>
       </p:sp>
-      <p:sp>
-        <p:nvSpPr>
-          <p:cNvPr id="8" name="Oval 7"/>
-          <p:cNvSpPr/>
+      <p:pic>
+        <p:nvPicPr>
+          <p:cNvPr id="8" name="Picture 7" descr="foundation-logo-white.png"/>
+          <p:cNvPicPr>
+            <a:picLocks noChangeAspect="1"/>
+          </p:cNvPicPr>
           <p:nvPr/>
-        </p:nvSpPr>
+        </p:nvPicPr>
+        <p:blipFill>
+          <a:blip r:embed="rId3"/>
+          <a:stretch>
+            <a:fillRect/>
+          </a:stretch>
+        </p:blipFill>
         <p:spPr>
           <a:xfrm>
-            <a:off x="8667750" y="11239500"/>
-            <a:ext cx="857250" cy="857250"/>
-          </a:xfrm>
-          <a:prstGeom prst="ellipse">
-            <a:avLst/>
-          </a:prstGeom>
-          <a:noFill/>
-          <a:ln w="19050">
-            <a:solidFill>
-              <a:srgbClr val="F4F1EA"/>
-            </a:solidFill>
-          </a:ln>
-          <a:effectLst/>
-        </p:spPr>
-        <p:style>
-          <a:lnRef idx="1">
-            <a:schemeClr val="accent1"/>
-          </a:lnRef>
-          <a:fillRef idx="3">
-            <a:schemeClr val="accent1"/>
-          </a:fillRef>
-          <a:effectRef idx="2">
-            <a:schemeClr val="accent1"/>
-          </a:effectRef>
-          <a:fontRef idx="minor">
-            <a:schemeClr val="lt1"/>
-          </a:fontRef>
-        </p:style>
-        <p:txBody>
-          <a:bodyPr rtlCol="0" anchor="ctr"/>
-          <a:lstStyle/>
-          <a:p>
-            <a:pPr algn="ctr"/>
-          </a:p>
-        </p:txBody>
-      </p:sp>
-      <p:sp>
-        <p:nvSpPr>
-          <p:cNvPr id="9" name="TextBox 8"/>
-          <p:cNvSpPr txBox="1"/>
-          <p:nvPr/>
-        </p:nvSpPr>
-        <p:spPr>
-          <a:xfrm>
-            <a:off x="8667750" y="11239500"/>
-            <a:ext cx="857250" cy="857250"/>
+            <a:off x="8571501" y="11239500"/>
+            <a:ext cx="953498" cy="857250"/>
           </a:xfrm>
           <a:prstGeom prst="rect">
             <a:avLst/>
           </a:prstGeom>
-          <a:noFill/>
         </p:spPr>
-        <p:txBody>
-          <a:bodyPr wrap="square" lIns="0" rIns="0" tIns="0" bIns="0" anchor="ctr">
-            <a:spAutoFit/>
-          </a:bodyPr>
-          <a:lstStyle/>
-          <a:p>
-            <a:pPr algn="ctr">
-              <a:lnSpc>
-                <a:spcPct val="120000"/>
-              </a:lnSpc>
-            </a:pPr>
-            <a:r>
-              <a:rPr sz="1800" b="1" i="0">
-                <a:solidFill>
-                  <a:srgbClr val="F4F1EA"/>
-                </a:solidFill>
-                <a:latin typeface="Montserrat"/>
-              </a:rPr>
-              <a:t>LOGO</a:t>
-            </a:r>
-          </a:p>
-        </p:txBody>
-      </p:sp>
-      <p:sp>
-        <p:nvSpPr>
-          <p:cNvPr id="10" name="TextBox 9"/>
+      </p:pic>
+      <p:sp>
+        <p:nvSpPr>
+          <p:cNvPr id="9" name="TextBox 8"/>
           <p:cNvSpPr txBox="1"/>
           <p:nvPr/>
         </p:nvSpPr>
@@ -4714,92 +4655,33 @@
           </a:p>
         </p:txBody>
       </p:sp>
-      <p:sp>
-        <p:nvSpPr>
-          <p:cNvPr id="5" name="Oval 4"/>
-          <p:cNvSpPr/>
+      <p:pic>
+        <p:nvPicPr>
+          <p:cNvPr id="5" name="Picture 4" descr="foundation-logo-white.png"/>
+          <p:cNvPicPr>
+            <a:picLocks noChangeAspect="1"/>
+          </p:cNvPicPr>
           <p:nvPr/>
-        </p:nvSpPr>
+        </p:nvPicPr>
+        <p:blipFill>
+          <a:blip r:embed="rId3"/>
+          <a:stretch>
+            <a:fillRect/>
+          </a:stretch>
+        </p:blipFill>
         <p:spPr>
           <a:xfrm>
-            <a:off x="8667750" y="11239500"/>
-            <a:ext cx="857250" cy="857250"/>
-          </a:xfrm>
-          <a:prstGeom prst="ellipse">
-            <a:avLst/>
-          </a:prstGeom>
-          <a:noFill/>
-          <a:ln w="19050">
-            <a:solidFill>
-              <a:srgbClr val="F4F1EA"/>
-            </a:solidFill>
-          </a:ln>
-          <a:effectLst/>
-        </p:spPr>
-        <p:style>
-          <a:lnRef idx="1">
-            <a:schemeClr val="accent1"/>
-          </a:lnRef>
-          <a:fillRef idx="3">
-            <a:schemeClr val="accent1"/>
-          </a:fillRef>
-          <a:effectRef idx="2">
-            <a:schemeClr val="accent1"/>
-          </a:effectRef>
-          <a:fontRef idx="minor">
-            <a:schemeClr val="lt1"/>
-          </a:fontRef>
-        </p:style>
-        <p:txBody>
-          <a:bodyPr rtlCol="0" anchor="ctr"/>
-          <a:lstStyle/>
-          <a:p>
-            <a:pPr algn="ctr"/>
-          </a:p>
-        </p:txBody>
-      </p:sp>
-      <p:sp>
-        <p:nvSpPr>
-          <p:cNvPr id="6" name="TextBox 5"/>
-          <p:cNvSpPr txBox="1"/>
-          <p:nvPr/>
-        </p:nvSpPr>
-        <p:spPr>
-          <a:xfrm>
-            <a:off x="8667750" y="11239500"/>
-            <a:ext cx="857250" cy="857250"/>
+            <a:off x="8571501" y="11239500"/>
+            <a:ext cx="953498" cy="857250"/>
           </a:xfrm>
           <a:prstGeom prst="rect">
             <a:avLst/>
           </a:prstGeom>
-          <a:noFill/>
         </p:spPr>
-        <p:txBody>
-          <a:bodyPr wrap="square" lIns="0" rIns="0" tIns="0" bIns="0" anchor="ctr">
-            <a:spAutoFit/>
-          </a:bodyPr>
-          <a:lstStyle/>
-          <a:p>
-            <a:pPr algn="ctr">
-              <a:lnSpc>
-                <a:spcPct val="120000"/>
-              </a:lnSpc>
-            </a:pPr>
-            <a:r>
-              <a:rPr sz="1800" b="1" i="0">
-                <a:solidFill>
-                  <a:srgbClr val="F4F1EA"/>
-                </a:solidFill>
-                <a:latin typeface="Montserrat"/>
-              </a:rPr>
-              <a:t>LOGO</a:t>
-            </a:r>
-          </a:p>
-        </p:txBody>
-      </p:sp>
-      <p:sp>
-        <p:nvSpPr>
-          <p:cNvPr id="7" name="TextBox 6"/>
+      </p:pic>
+      <p:sp>
+        <p:nvSpPr>
+          <p:cNvPr id="6" name="TextBox 5"/>
           <p:cNvSpPr txBox="1"/>
           <p:nvPr/>
         </p:nvSpPr>

--- a/templates/posts/october/2026-10-21-wed-ig-scholarship-recipient.pptx
+++ b/templates/posts/october/2026-10-21-wed-ig-scholarship-recipient.pptx
@@ -3717,7 +3717,7 @@
     <p:bg>
       <p:bgPr>
         <a:solidFill>
-          <a:srgbClr val="22371F"/>
+          <a:srgbClr val="1E3F1D"/>
         </a:solidFill>
         <a:effectLst/>
       </p:bgPr>
@@ -3829,7 +3829,7 @@
             </a:avLst>
           </a:prstGeom>
           <a:solidFill>
-            <a:srgbClr val="22371F">
+            <a:srgbClr val="1E3F1D">
               <a:alpha val="90000"/>
             </a:srgbClr>
           </a:solidFill>
@@ -3890,7 +3890,7 @@
             <a:r>
               <a:rPr sz="2200" b="1" i="0" spc="200">
                 <a:solidFill>
-                  <a:srgbClr val="DBE6A7"/>
+                  <a:srgbClr val="B1BCB1"/>
                 </a:solidFill>
                 <a:latin typeface="Montserrat"/>
               </a:rPr>
@@ -3914,7 +3914,7 @@
             <a:avLst/>
           </a:prstGeom>
           <a:solidFill>
-            <a:srgbClr val="22371F">
+            <a:srgbClr val="1E3F1D">
               <a:alpha val="90000"/>
             </a:srgbClr>
           </a:solidFill>
@@ -3975,7 +3975,7 @@
             <a:r>
               <a:rPr sz="3600" b="1" i="0">
                 <a:solidFill>
-                  <a:srgbClr val="F4F1EA"/>
+                  <a:srgbClr val="F3F1EA"/>
                 </a:solidFill>
                 <a:latin typeface="Montserrat"/>
               </a:rPr>
@@ -4038,7 +4038,7 @@
             <a:r>
               <a:rPr sz="2000" b="0" i="0">
                 <a:solidFill>
-                  <a:srgbClr val="F4F1EA">
+                  <a:srgbClr val="F3F1EA">
                     <a:alpha val="60000"/>
                   </a:srgbClr>
                 </a:solidFill>
@@ -4063,7 +4063,7 @@
     <p:bg>
       <p:bgPr>
         <a:solidFill>
-          <a:srgbClr val="F4F1EA"/>
+          <a:srgbClr val="F3F1EA"/>
         </a:solidFill>
         <a:effectLst/>
       </p:bgPr>
@@ -4188,7 +4188,7 @@
             <a:r>
               <a:rPr sz="2000" b="1" i="0" spc="200">
                 <a:solidFill>
-                  <a:srgbClr val="156826"/>
+                  <a:srgbClr val="31662F"/>
                 </a:solidFill>
                 <a:latin typeface="Montserrat"/>
               </a:rPr>
@@ -4227,7 +4227,7 @@
             <a:r>
               <a:rPr sz="3800" b="0" i="0">
                 <a:solidFill>
-                  <a:srgbClr val="22371F"/>
+                  <a:srgbClr val="1E3F1D"/>
                 </a:solidFill>
                 <a:latin typeface="Source Sans 3"/>
               </a:rPr>
@@ -4291,7 +4291,7 @@
     <p:bg>
       <p:bgPr>
         <a:solidFill>
-          <a:srgbClr val="F4F1EA"/>
+          <a:srgbClr val="F3F1EA"/>
         </a:solidFill>
         <a:effectLst/>
       </p:bgPr>
@@ -4416,7 +4416,7 @@
             <a:r>
               <a:rPr sz="2000" b="1" i="0" spc="200">
                 <a:solidFill>
-                  <a:srgbClr val="156826"/>
+                  <a:srgbClr val="31662F"/>
                 </a:solidFill>
                 <a:latin typeface="Montserrat"/>
               </a:rPr>
@@ -4455,7 +4455,7 @@
             <a:r>
               <a:rPr sz="3800" b="0" i="0">
                 <a:solidFill>
-                  <a:srgbClr val="22371F"/>
+                  <a:srgbClr val="1E3F1D"/>
                 </a:solidFill>
                 <a:latin typeface="Source Sans 3"/>
               </a:rPr>
@@ -4519,7 +4519,7 @@
     <p:bg>
       <p:bgPr>
         <a:solidFill>
-          <a:srgbClr val="22371F"/>
+          <a:srgbClr val="1E3F1D"/>
         </a:solidFill>
         <a:effectLst/>
       </p:bgPr>
@@ -4561,7 +4561,7 @@
             <a:r>
               <a:rPr sz="5600" b="1" i="0">
                 <a:solidFill>
-                  <a:srgbClr val="F4F1EA"/>
+                  <a:srgbClr val="F3F1EA"/>
                 </a:solidFill>
                 <a:latin typeface="Montserrat"/>
               </a:rPr>
@@ -4587,7 +4587,7 @@
             </a:avLst>
           </a:prstGeom>
           <a:solidFill>
-            <a:srgbClr val="C9A227"/>
+            <a:srgbClr val="D39C48"/>
           </a:solidFill>
           <a:ln>
             <a:noFill/>
@@ -4646,7 +4646,7 @@
             <a:r>
               <a:rPr sz="3000" b="1" i="0">
                 <a:solidFill>
-                  <a:srgbClr val="22371F"/>
+                  <a:srgbClr val="1E3F1D"/>
                 </a:solidFill>
                 <a:latin typeface="Montserrat"/>
               </a:rPr>
@@ -4709,7 +4709,7 @@
             <a:r>
               <a:rPr sz="2000" b="0" i="0">
                 <a:solidFill>
-                  <a:srgbClr val="F4F1EA">
+                  <a:srgbClr val="F3F1EA">
                     <a:alpha val="60000"/>
                   </a:srgbClr>
                 </a:solidFill>
